--- a/docs/pitch/CYBR698_CapstoneProject_Presentation_WithSpeakerNotes.pptx
+++ b/docs/pitch/CYBR698_CapstoneProject_Presentation_WithSpeakerNotes.pptx
@@ -5,7 +5,7 @@
     <p:sldMasterId id="2147483660" r:id="rId1"/>
   </p:sldMasterIdLst>
   <p:notesMasterIdLst>
-    <p:notesMasterId r:id="rId20"/>
+    <p:notesMasterId r:id="rId21"/>
   </p:notesMasterIdLst>
   <p:sldIdLst>
     <p:sldId id="256" r:id="rId2"/>
@@ -18,14 +18,15 @@
     <p:sldId id="306" r:id="rId9"/>
     <p:sldId id="308" r:id="rId10"/>
     <p:sldId id="309" r:id="rId11"/>
-    <p:sldId id="310" r:id="rId12"/>
-    <p:sldId id="311" r:id="rId13"/>
-    <p:sldId id="312" r:id="rId14"/>
-    <p:sldId id="313" r:id="rId15"/>
-    <p:sldId id="314" r:id="rId16"/>
-    <p:sldId id="315" r:id="rId17"/>
-    <p:sldId id="307" r:id="rId18"/>
-    <p:sldId id="277" r:id="rId19"/>
+    <p:sldId id="316" r:id="rId12"/>
+    <p:sldId id="310" r:id="rId13"/>
+    <p:sldId id="311" r:id="rId14"/>
+    <p:sldId id="312" r:id="rId15"/>
+    <p:sldId id="313" r:id="rId16"/>
+    <p:sldId id="314" r:id="rId17"/>
+    <p:sldId id="315" r:id="rId18"/>
+    <p:sldId id="307" r:id="rId19"/>
+    <p:sldId id="277" r:id="rId20"/>
   </p:sldIdLst>
   <p:sldSz cx="12192000" cy="6858000"/>
   <p:notesSz cx="6858000" cy="9144000"/>
@@ -132,12 +133,20 @@
 </p:presentation>
 </file>
 
+<file path=ppt/revisionInfo.xml><?xml version="1.0" encoding="utf-8"?>
+<p1510:revInfo xmlns:a="http://schemas.openxmlformats.org/drawingml/2006/main" xmlns:r="http://schemas.openxmlformats.org/officeDocument/2006/relationships" xmlns:p1510="http://schemas.microsoft.com/office/powerpoint/2015/10/main">
+  <p1510:revLst>
+    <p1510:client id="{C7B33B64-54EE-4565-8BA0-135C0838E05F}" v="1" dt="2025-12-08T05:19:40.460"/>
+  </p1510:revLst>
+</p1510:revInfo>
+</file>
+
 <file path=ppt/changesInfos/changesInfo1.xml><?xml version="1.0" encoding="utf-8"?>
 <pc:chgInfo xmlns:a="http://schemas.openxmlformats.org/drawingml/2006/main" xmlns:r="http://schemas.openxmlformats.org/officeDocument/2006/relationships" xmlns:ac="http://schemas.microsoft.com/office/drawing/2013/main/command" xmlns:pc="http://schemas.microsoft.com/office/powerpoint/2013/main/command">
   <pc:docChgLst>
     <pc:chgData name="Bhandari, Ishita" userId="f19e3e0a-b09b-4c0e-bd9a-1660a3c48173" providerId="ADAL" clId="{298426B1-6A62-4EAD-923E-856376C23638}"/>
-    <pc:docChg chg="custSel modSld">
-      <pc:chgData name="Bhandari, Ishita" userId="f19e3e0a-b09b-4c0e-bd9a-1660a3c48173" providerId="ADAL" clId="{298426B1-6A62-4EAD-923E-856376C23638}" dt="2025-12-08T05:14:35.257" v="3" actId="207"/>
+    <pc:docChg chg="custSel addSld modSld">
+      <pc:chgData name="Bhandari, Ishita" userId="f19e3e0a-b09b-4c0e-bd9a-1660a3c48173" providerId="ADAL" clId="{298426B1-6A62-4EAD-923E-856376C23638}" dt="2025-12-08T05:25:12.670" v="75" actId="14100"/>
       <pc:docMkLst>
         <pc:docMk/>
       </pc:docMkLst>
@@ -161,6 +170,68 @@
             <pc:docMk/>
             <pc:sldMk cId="2027503659" sldId="277"/>
             <ac:picMk id="7" creationId="{218BDE0F-7053-BC70-A0AE-7150F1C018C7}"/>
+          </ac:picMkLst>
+        </pc:picChg>
+      </pc:sldChg>
+      <pc:sldChg chg="addSp modSp mod">
+        <pc:chgData name="Bhandari, Ishita" userId="f19e3e0a-b09b-4c0e-bd9a-1660a3c48173" providerId="ADAL" clId="{298426B1-6A62-4EAD-923E-856376C23638}" dt="2025-12-08T05:25:12.670" v="75" actId="14100"/>
+        <pc:sldMkLst>
+          <pc:docMk/>
+          <pc:sldMk cId="1489247190" sldId="315"/>
+        </pc:sldMkLst>
+        <pc:spChg chg="mod">
+          <ac:chgData name="Bhandari, Ishita" userId="f19e3e0a-b09b-4c0e-bd9a-1660a3c48173" providerId="ADAL" clId="{298426B1-6A62-4EAD-923E-856376C23638}" dt="2025-12-08T05:25:05.035" v="72" actId="1076"/>
+          <ac:spMkLst>
+            <pc:docMk/>
+            <pc:sldMk cId="1489247190" sldId="315"/>
+            <ac:spMk id="7" creationId="{6A0F786D-1EAA-5517-BBC7-73B47D6CF9B1}"/>
+          </ac:spMkLst>
+        </pc:spChg>
+        <pc:picChg chg="add mod">
+          <ac:chgData name="Bhandari, Ishita" userId="f19e3e0a-b09b-4c0e-bd9a-1660a3c48173" providerId="ADAL" clId="{298426B1-6A62-4EAD-923E-856376C23638}" dt="2025-12-08T05:25:12.670" v="75" actId="14100"/>
+          <ac:picMkLst>
+            <pc:docMk/>
+            <pc:sldMk cId="1489247190" sldId="315"/>
+            <ac:picMk id="5" creationId="{61046C52-FAE9-3D6D-77CD-5D7F842901FD}"/>
+          </ac:picMkLst>
+        </pc:picChg>
+      </pc:sldChg>
+      <pc:sldChg chg="addSp delSp modSp add mod modNotesTx">
+        <pc:chgData name="Bhandari, Ishita" userId="f19e3e0a-b09b-4c0e-bd9a-1660a3c48173" providerId="ADAL" clId="{298426B1-6A62-4EAD-923E-856376C23638}" dt="2025-12-08T05:22:27.402" v="69" actId="14100"/>
+        <pc:sldMkLst>
+          <pc:docMk/>
+          <pc:sldMk cId="1759964506" sldId="316"/>
+        </pc:sldMkLst>
+        <pc:spChg chg="mod">
+          <ac:chgData name="Bhandari, Ishita" userId="f19e3e0a-b09b-4c0e-bd9a-1660a3c48173" providerId="ADAL" clId="{298426B1-6A62-4EAD-923E-856376C23638}" dt="2025-12-08T05:19:45.413" v="14" actId="20577"/>
+          <ac:spMkLst>
+            <pc:docMk/>
+            <pc:sldMk cId="1759964506" sldId="316"/>
+            <ac:spMk id="2" creationId="{BDCA2B99-5EE4-6BE4-6556-62292BC9ACD1}"/>
+          </ac:spMkLst>
+        </pc:spChg>
+        <pc:graphicFrameChg chg="del">
+          <ac:chgData name="Bhandari, Ishita" userId="f19e3e0a-b09b-4c0e-bd9a-1660a3c48173" providerId="ADAL" clId="{298426B1-6A62-4EAD-923E-856376C23638}" dt="2025-12-08T05:19:49.435" v="15" actId="478"/>
+          <ac:graphicFrameMkLst>
+            <pc:docMk/>
+            <pc:sldMk cId="1759964506" sldId="316"/>
+            <ac:graphicFrameMk id="5" creationId="{304CD40B-8259-BA78-5BDD-B78EE85A7D21}"/>
+          </ac:graphicFrameMkLst>
+        </pc:graphicFrameChg>
+        <pc:picChg chg="add mod">
+          <ac:chgData name="Bhandari, Ishita" userId="f19e3e0a-b09b-4c0e-bd9a-1660a3c48173" providerId="ADAL" clId="{298426B1-6A62-4EAD-923E-856376C23638}" dt="2025-12-08T05:22:20.461" v="67" actId="14100"/>
+          <ac:picMkLst>
+            <pc:docMk/>
+            <pc:sldMk cId="1759964506" sldId="316"/>
+            <ac:picMk id="4" creationId="{FA3295D3-BCDB-FA88-B9D9-1715C8D5F660}"/>
+          </ac:picMkLst>
+        </pc:picChg>
+        <pc:picChg chg="add mod">
+          <ac:chgData name="Bhandari, Ishita" userId="f19e3e0a-b09b-4c0e-bd9a-1660a3c48173" providerId="ADAL" clId="{298426B1-6A62-4EAD-923E-856376C23638}" dt="2025-12-08T05:22:27.402" v="69" actId="14100"/>
+          <ac:picMkLst>
+            <pc:docMk/>
+            <pc:sldMk cId="1759964506" sldId="316"/>
+            <ac:picMk id="7" creationId="{581A62A1-172D-A621-08B9-E07E05205AFF}"/>
           </ac:picMkLst>
         </pc:picChg>
       </pc:sldChg>
@@ -748,6 +819,117 @@
   <p:cSld>
     <p:spTree>
       <p:nvGrpSpPr>
+        <p:cNvPr id="1" name="">
+          <a:extLst>
+            <a:ext uri="{FF2B5EF4-FFF2-40B4-BE49-F238E27FC236}">
+              <a16:creationId xmlns:a16="http://schemas.microsoft.com/office/drawing/2014/main" id="{0DB5E6D6-E70A-6AF4-C8AC-C991861EF363}"/>
+            </a:ext>
+          </a:extLst>
+        </p:cNvPr>
+        <p:cNvGrpSpPr/>
+        <p:nvPr/>
+      </p:nvGrpSpPr>
+      <p:grpSpPr>
+        <a:xfrm>
+          <a:off x="0" y="0"/>
+          <a:ext cx="0" cy="0"/>
+          <a:chOff x="0" y="0"/>
+          <a:chExt cx="0" cy="0"/>
+        </a:xfrm>
+      </p:grpSpPr>
+      <p:sp>
+        <p:nvSpPr>
+          <p:cNvPr id="2" name="Slide Image Placeholder 1">
+            <a:extLst>
+              <a:ext uri="{FF2B5EF4-FFF2-40B4-BE49-F238E27FC236}">
+                <a16:creationId xmlns:a16="http://schemas.microsoft.com/office/drawing/2014/main" id="{296CB00E-323C-530D-B591-805AE5B7A3AE}"/>
+              </a:ext>
+            </a:extLst>
+          </p:cNvPr>
+          <p:cNvSpPr>
+            <a:spLocks noGrp="1" noRot="1" noChangeAspect="1"/>
+          </p:cNvSpPr>
+          <p:nvPr>
+            <p:ph type="sldImg"/>
+          </p:nvPr>
+        </p:nvSpPr>
+        <p:spPr/>
+      </p:sp>
+      <p:sp>
+        <p:nvSpPr>
+          <p:cNvPr id="3" name="Notes Placeholder 2">
+            <a:extLst>
+              <a:ext uri="{FF2B5EF4-FFF2-40B4-BE49-F238E27FC236}">
+                <a16:creationId xmlns:a16="http://schemas.microsoft.com/office/drawing/2014/main" id="{50AA71A9-3239-2022-63E0-178B786E11BA}"/>
+              </a:ext>
+            </a:extLst>
+          </p:cNvPr>
+          <p:cNvSpPr>
+            <a:spLocks noGrp="1"/>
+          </p:cNvSpPr>
+          <p:nvPr>
+            <p:ph type="body" idx="1"/>
+          </p:nvPr>
+        </p:nvSpPr>
+        <p:spPr/>
+        <p:txBody>
+          <a:bodyPr/>
+          <a:lstStyle/>
+          <a:p>
+            <a:r>
+              <a:rPr lang="en-US" dirty="0"/>
+              <a:t>Exact Screenshot from CSF2.0 and SO 800-207</a:t>
+            </a:r>
+          </a:p>
+        </p:txBody>
+      </p:sp>
+      <p:sp>
+        <p:nvSpPr>
+          <p:cNvPr id="4" name="Slide Number Placeholder 3">
+            <a:extLst>
+              <a:ext uri="{FF2B5EF4-FFF2-40B4-BE49-F238E27FC236}">
+                <a16:creationId xmlns:a16="http://schemas.microsoft.com/office/drawing/2014/main" id="{4FCA2E88-4B59-CC89-92C8-25FED36BDA8C}"/>
+              </a:ext>
+            </a:extLst>
+          </p:cNvPr>
+          <p:cNvSpPr>
+            <a:spLocks noGrp="1"/>
+          </p:cNvSpPr>
+          <p:nvPr>
+            <p:ph type="sldNum" sz="quarter" idx="5"/>
+          </p:nvPr>
+        </p:nvSpPr>
+        <p:spPr/>
+        <p:txBody>
+          <a:bodyPr/>
+          <a:lstStyle/>
+          <a:p>
+            <a:fld id="{8AA39B21-60E2-4593-B64E-3632996FCCB0}" type="slidenum">
+              <a:rPr lang="en-US" smtClean="0"/>
+              <a:t>11</a:t>
+            </a:fld>
+            <a:endParaRPr lang="en-US"/>
+          </a:p>
+        </p:txBody>
+      </p:sp>
+    </p:spTree>
+    <p:extLst>
+      <p:ext uri="{BB962C8B-B14F-4D97-AF65-F5344CB8AC3E}">
+        <p14:creationId xmlns:p14="http://schemas.microsoft.com/office/powerpoint/2010/main" val="874897186"/>
+      </p:ext>
+    </p:extLst>
+  </p:cSld>
+  <p:clrMapOvr>
+    <a:masterClrMapping/>
+  </p:clrMapOvr>
+</p:notes>
+</file>
+
+<file path=ppt/notesSlides/notesSlide12.xml><?xml version="1.0" encoding="utf-8"?>
+<p:notes xmlns:a="http://schemas.openxmlformats.org/drawingml/2006/main" xmlns:r="http://schemas.openxmlformats.org/officeDocument/2006/relationships" xmlns:p="http://schemas.openxmlformats.org/presentationml/2006/main">
+  <p:cSld>
+    <p:spTree>
+      <p:nvGrpSpPr>
         <p:cNvPr id="1" name=""/>
         <p:cNvGrpSpPr/>
         <p:nvPr/>
@@ -854,7 +1036,7 @@
           <a:p>
             <a:fld id="{8AA39B21-60E2-4593-B64E-3632996FCCB0}" type="slidenum">
               <a:rPr lang="en-US" smtClean="0"/>
-              <a:t>11</a:t>
+              <a:t>12</a:t>
             </a:fld>
             <a:endParaRPr lang="en-US"/>
           </a:p>
@@ -873,7 +1055,7 @@
 </p:notes>
 </file>
 
-<file path=ppt/notesSlides/notesSlide12.xml><?xml version="1.0" encoding="utf-8"?>
+<file path=ppt/notesSlides/notesSlide13.xml><?xml version="1.0" encoding="utf-8"?>
 <p:notes xmlns:a="http://schemas.openxmlformats.org/drawingml/2006/main" xmlns:r="http://schemas.openxmlformats.org/officeDocument/2006/relationships" xmlns:p="http://schemas.openxmlformats.org/presentationml/2006/main">
   <p:cSld>
     <p:spTree>
@@ -973,7 +1155,7 @@
           <a:p>
             <a:fld id="{8AA39B21-60E2-4593-B64E-3632996FCCB0}" type="slidenum">
               <a:rPr lang="en-US" smtClean="0"/>
-              <a:t>12</a:t>
+              <a:t>13</a:t>
             </a:fld>
             <a:endParaRPr lang="en-US"/>
           </a:p>
@@ -992,7 +1174,7 @@
 </p:notes>
 </file>
 
-<file path=ppt/notesSlides/notesSlide13.xml><?xml version="1.0" encoding="utf-8"?>
+<file path=ppt/notesSlides/notesSlide14.xml><?xml version="1.0" encoding="utf-8"?>
 <p:notes xmlns:a="http://schemas.openxmlformats.org/drawingml/2006/main" xmlns:r="http://schemas.openxmlformats.org/officeDocument/2006/relationships" xmlns:p="http://schemas.openxmlformats.org/presentationml/2006/main">
   <p:cSld>
     <p:spTree>
@@ -1092,7 +1274,7 @@
           <a:p>
             <a:fld id="{8AA39B21-60E2-4593-B64E-3632996FCCB0}" type="slidenum">
               <a:rPr lang="en-US" smtClean="0"/>
-              <a:t>13</a:t>
+              <a:t>14</a:t>
             </a:fld>
             <a:endParaRPr lang="en-US"/>
           </a:p>
@@ -1111,7 +1293,7 @@
 </p:notes>
 </file>
 
-<file path=ppt/notesSlides/notesSlide14.xml><?xml version="1.0" encoding="utf-8"?>
+<file path=ppt/notesSlides/notesSlide15.xml><?xml version="1.0" encoding="utf-8"?>
 <p:notes xmlns:a="http://schemas.openxmlformats.org/drawingml/2006/main" xmlns:r="http://schemas.openxmlformats.org/officeDocument/2006/relationships" xmlns:p="http://schemas.openxmlformats.org/presentationml/2006/main">
   <p:cSld>
     <p:spTree>
@@ -1241,7 +1423,7 @@
           <a:p>
             <a:fld id="{8AA39B21-60E2-4593-B64E-3632996FCCB0}" type="slidenum">
               <a:rPr lang="en-US" smtClean="0"/>
-              <a:t>14</a:t>
+              <a:t>15</a:t>
             </a:fld>
             <a:endParaRPr lang="en-US"/>
           </a:p>
@@ -1260,7 +1442,7 @@
 </p:notes>
 </file>
 
-<file path=ppt/notesSlides/notesSlide15.xml><?xml version="1.0" encoding="utf-8"?>
+<file path=ppt/notesSlides/notesSlide16.xml><?xml version="1.0" encoding="utf-8"?>
 <p:notes xmlns:a="http://schemas.openxmlformats.org/drawingml/2006/main" xmlns:r="http://schemas.openxmlformats.org/officeDocument/2006/relationships" xmlns:p="http://schemas.openxmlformats.org/presentationml/2006/main">
   <p:cSld>
     <p:spTree>
@@ -1415,7 +1597,7 @@
           <a:p>
             <a:fld id="{8AA39B21-60E2-4593-B64E-3632996FCCB0}" type="slidenum">
               <a:rPr lang="en-US" smtClean="0"/>
-              <a:t>15</a:t>
+              <a:t>16</a:t>
             </a:fld>
             <a:endParaRPr lang="en-US"/>
           </a:p>
@@ -1434,7 +1616,7 @@
 </p:notes>
 </file>
 
-<file path=ppt/notesSlides/notesSlide16.xml><?xml version="1.0" encoding="utf-8"?>
+<file path=ppt/notesSlides/notesSlide17.xml><?xml version="1.0" encoding="utf-8"?>
 <p:notes xmlns:a="http://schemas.openxmlformats.org/drawingml/2006/main" xmlns:r="http://schemas.openxmlformats.org/officeDocument/2006/relationships" xmlns:p="http://schemas.openxmlformats.org/presentationml/2006/main">
   <p:cSld>
     <p:spTree>
@@ -1526,7 +1708,7 @@
           <a:p>
             <a:fld id="{8AA39B21-60E2-4593-B64E-3632996FCCB0}" type="slidenum">
               <a:rPr lang="en-US" smtClean="0"/>
-              <a:t>16</a:t>
+              <a:t>17</a:t>
             </a:fld>
             <a:endParaRPr lang="en-US"/>
           </a:p>
@@ -1545,7 +1727,7 @@
 </p:notes>
 </file>
 
-<file path=ppt/notesSlides/notesSlide17.xml><?xml version="1.0" encoding="utf-8"?>
+<file path=ppt/notesSlides/notesSlide18.xml><?xml version="1.0" encoding="utf-8"?>
 <p:notes xmlns:a="http://schemas.openxmlformats.org/drawingml/2006/main" xmlns:r="http://schemas.openxmlformats.org/officeDocument/2006/relationships" xmlns:p="http://schemas.openxmlformats.org/presentationml/2006/main">
   <p:cSld>
     <p:spTree>
@@ -1637,7 +1819,7 @@
           <a:p>
             <a:fld id="{8AA39B21-60E2-4593-B64E-3632996FCCB0}" type="slidenum">
               <a:rPr lang="en-US" smtClean="0"/>
-              <a:t>17</a:t>
+              <a:t>18</a:t>
             </a:fld>
             <a:endParaRPr lang="en-US"/>
           </a:p>
@@ -10306,6 +10488,159 @@
         <p:cNvPr id="1" name="">
           <a:extLst>
             <a:ext uri="{FF2B5EF4-FFF2-40B4-BE49-F238E27FC236}">
+              <a16:creationId xmlns:a16="http://schemas.microsoft.com/office/drawing/2014/main" id="{381ED545-17D6-A55D-BAE0-B28BEC6A1ABF}"/>
+            </a:ext>
+          </a:extLst>
+        </p:cNvPr>
+        <p:cNvGrpSpPr/>
+        <p:nvPr/>
+      </p:nvGrpSpPr>
+      <p:grpSpPr>
+        <a:xfrm>
+          <a:off x="0" y="0"/>
+          <a:ext cx="0" cy="0"/>
+          <a:chOff x="0" y="0"/>
+          <a:chExt cx="0" cy="0"/>
+        </a:xfrm>
+      </p:grpSpPr>
+      <p:sp>
+        <p:nvSpPr>
+          <p:cNvPr id="2" name="Title 1">
+            <a:extLst>
+              <a:ext uri="{FF2B5EF4-FFF2-40B4-BE49-F238E27FC236}">
+                <a16:creationId xmlns:a16="http://schemas.microsoft.com/office/drawing/2014/main" id="{BDCA2B99-5EE4-6BE4-6556-62292BC9ACD1}"/>
+              </a:ext>
+            </a:extLst>
+          </p:cNvPr>
+          <p:cNvSpPr>
+            <a:spLocks noGrp="1"/>
+          </p:cNvSpPr>
+          <p:nvPr>
+            <p:ph type="title"/>
+          </p:nvPr>
+        </p:nvSpPr>
+        <p:spPr>
+          <a:xfrm>
+            <a:off x="380634" y="131492"/>
+            <a:ext cx="9377728" cy="734351"/>
+          </a:xfrm>
+        </p:spPr>
+        <p:txBody>
+          <a:bodyPr>
+            <a:noAutofit/>
+          </a:bodyPr>
+          <a:lstStyle/>
+          <a:p>
+            <a:pPr>
+              <a:lnSpc>
+                <a:spcPct val="90000"/>
+              </a:lnSpc>
+            </a:pPr>
+            <a:r>
+              <a:rPr lang="en-US" b="1" dirty="0"/>
+              <a:t>STANDARDS ANCHORS - CSF 2.0 &amp; ZERO TRUST (ZTA)- Evidence</a:t>
+            </a:r>
+            <a:endParaRPr lang="en-US" b="1" dirty="0">
+              <a:latin typeface="Aptos" panose="020B0004020202020204" pitchFamily="34" charset="0"/>
+              <a:ea typeface="+mj-lt"/>
+              <a:cs typeface="+mj-lt"/>
+            </a:endParaRPr>
+          </a:p>
+        </p:txBody>
+      </p:sp>
+      <p:pic>
+        <p:nvPicPr>
+          <p:cNvPr id="4" name="Picture 3">
+            <a:extLst>
+              <a:ext uri="{FF2B5EF4-FFF2-40B4-BE49-F238E27FC236}">
+                <a16:creationId xmlns:a16="http://schemas.microsoft.com/office/drawing/2014/main" id="{FA3295D3-BCDB-FA88-B9D9-1715C8D5F660}"/>
+              </a:ext>
+            </a:extLst>
+          </p:cNvPr>
+          <p:cNvPicPr>
+            <a:picLocks noChangeAspect="1"/>
+          </p:cNvPicPr>
+          <p:nvPr/>
+        </p:nvPicPr>
+        <p:blipFill>
+          <a:blip r:embed="rId3"/>
+          <a:stretch>
+            <a:fillRect/>
+          </a:stretch>
+        </p:blipFill>
+        <p:spPr>
+          <a:xfrm>
+            <a:off x="380634" y="1229594"/>
+            <a:ext cx="5574396" cy="5376351"/>
+          </a:xfrm>
+          <a:prstGeom prst="rect">
+            <a:avLst/>
+          </a:prstGeom>
+        </p:spPr>
+      </p:pic>
+      <p:pic>
+        <p:nvPicPr>
+          <p:cNvPr id="7" name="Picture 6">
+            <a:extLst>
+              <a:ext uri="{FF2B5EF4-FFF2-40B4-BE49-F238E27FC236}">
+                <a16:creationId xmlns:a16="http://schemas.microsoft.com/office/drawing/2014/main" id="{581A62A1-172D-A621-08B9-E07E05205AFF}"/>
+              </a:ext>
+            </a:extLst>
+          </p:cNvPr>
+          <p:cNvPicPr>
+            <a:picLocks noChangeAspect="1"/>
+          </p:cNvPicPr>
+          <p:nvPr/>
+        </p:nvPicPr>
+        <p:blipFill>
+          <a:blip r:embed="rId4"/>
+          <a:stretch>
+            <a:fillRect/>
+          </a:stretch>
+        </p:blipFill>
+        <p:spPr>
+          <a:xfrm>
+            <a:off x="6236972" y="1229594"/>
+            <a:ext cx="5758750" cy="5102626"/>
+          </a:xfrm>
+          <a:prstGeom prst="rect">
+            <a:avLst/>
+          </a:prstGeom>
+        </p:spPr>
+      </p:pic>
+    </p:spTree>
+    <p:extLst>
+      <p:ext uri="{BB962C8B-B14F-4D97-AF65-F5344CB8AC3E}">
+        <p14:creationId xmlns:p14="http://schemas.microsoft.com/office/powerpoint/2010/main" val="1759964506"/>
+      </p:ext>
+    </p:extLst>
+  </p:cSld>
+  <p:clrMapOvr>
+    <a:masterClrMapping/>
+  </p:clrMapOvr>
+  <mc:AlternateContent xmlns:mc="http://schemas.openxmlformats.org/markup-compatibility/2006" xmlns:p159="http://schemas.microsoft.com/office/powerpoint/2015/09/main">
+    <mc:Choice Requires="p159">
+      <p:transition xmlns:p14="http://schemas.microsoft.com/office/powerpoint/2010/main" spd="slow" p14:dur="2000">
+        <p159:morph option="byObject"/>
+      </p:transition>
+    </mc:Choice>
+    <mc:Fallback xmlns="">
+      <p:transition spd="slow">
+        <p:fade/>
+      </p:transition>
+    </mc:Fallback>
+  </mc:AlternateContent>
+</p:sld>
+</file>
+
+<file path=ppt/slides/slide12.xml><?xml version="1.0" encoding="utf-8"?>
+<p:sld xmlns:a="http://schemas.openxmlformats.org/drawingml/2006/main" xmlns:r="http://schemas.openxmlformats.org/officeDocument/2006/relationships" xmlns:p="http://schemas.openxmlformats.org/presentationml/2006/main">
+  <p:cSld>
+    <p:spTree>
+      <p:nvGrpSpPr>
+        <p:cNvPr id="1" name="">
+          <a:extLst>
+            <a:ext uri="{FF2B5EF4-FFF2-40B4-BE49-F238E27FC236}">
               <a16:creationId xmlns:a16="http://schemas.microsoft.com/office/drawing/2014/main" id="{C6A79F90-0BEB-BD03-9847-A0AF1FD87B53}"/>
             </a:ext>
           </a:extLst>
@@ -10494,7 +10829,7 @@
 </p:sld>
 </file>
 
-<file path=ppt/slides/slide12.xml><?xml version="1.0" encoding="utf-8"?>
+<file path=ppt/slides/slide13.xml><?xml version="1.0" encoding="utf-8"?>
 <p:sld xmlns:a="http://schemas.openxmlformats.org/drawingml/2006/main" xmlns:r="http://schemas.openxmlformats.org/officeDocument/2006/relationships" xmlns:p="http://schemas.openxmlformats.org/presentationml/2006/main">
   <p:cSld>
     <p:spTree>
@@ -11600,7 +11935,7 @@
 </p:sld>
 </file>
 
-<file path=ppt/slides/slide13.xml><?xml version="1.0" encoding="utf-8"?>
+<file path=ppt/slides/slide14.xml><?xml version="1.0" encoding="utf-8"?>
 <p:sld xmlns:a="http://schemas.openxmlformats.org/drawingml/2006/main" xmlns:r="http://schemas.openxmlformats.org/officeDocument/2006/relationships" xmlns:p="http://schemas.openxmlformats.org/presentationml/2006/main">
   <p:cSld>
     <p:spTree>
@@ -11993,7 +12328,7 @@
 </p:sld>
 </file>
 
-<file path=ppt/slides/slide14.xml><?xml version="1.0" encoding="utf-8"?>
+<file path=ppt/slides/slide15.xml><?xml version="1.0" encoding="utf-8"?>
 <p:sld xmlns:a="http://schemas.openxmlformats.org/drawingml/2006/main" xmlns:r="http://schemas.openxmlformats.org/officeDocument/2006/relationships" xmlns:p="http://schemas.openxmlformats.org/presentationml/2006/main">
   <p:cSld>
     <p:spTree>
@@ -12325,7 +12660,7 @@
 </p:sld>
 </file>
 
-<file path=ppt/slides/slide15.xml><?xml version="1.0" encoding="utf-8"?>
+<file path=ppt/slides/slide16.xml><?xml version="1.0" encoding="utf-8"?>
 <p:sld xmlns:a="http://schemas.openxmlformats.org/drawingml/2006/main" xmlns:r="http://schemas.openxmlformats.org/officeDocument/2006/relationships" xmlns:p="http://schemas.openxmlformats.org/presentationml/2006/main">
   <p:cSld>
     <p:spTree>
@@ -12557,7 +12892,7 @@
 </p:sld>
 </file>
 
-<file path=ppt/slides/slide16.xml><?xml version="1.0" encoding="utf-8"?>
+<file path=ppt/slides/slide17.xml><?xml version="1.0" encoding="utf-8"?>
 <p:sld xmlns:a="http://schemas.openxmlformats.org/drawingml/2006/main" xmlns:r="http://schemas.openxmlformats.org/officeDocument/2006/relationships" xmlns:p="http://schemas.openxmlformats.org/presentationml/2006/main">
   <p:cSld>
     <p:spTree>
@@ -12668,7 +13003,7 @@
         </p:nvSpPr>
         <p:spPr>
           <a:xfrm>
-            <a:off x="164502" y="1370655"/>
+            <a:off x="0" y="822273"/>
             <a:ext cx="11626053" cy="369332"/>
           </a:xfrm>
           <a:prstGeom prst="rect">
@@ -12690,6 +13025,36 @@
           </a:p>
         </p:txBody>
       </p:sp>
+      <p:pic>
+        <p:nvPicPr>
+          <p:cNvPr id="5" name="Picture 4">
+            <a:extLst>
+              <a:ext uri="{FF2B5EF4-FFF2-40B4-BE49-F238E27FC236}">
+                <a16:creationId xmlns:a16="http://schemas.microsoft.com/office/drawing/2014/main" id="{61046C52-FAE9-3D6D-77CD-5D7F842901FD}"/>
+              </a:ext>
+            </a:extLst>
+          </p:cNvPr>
+          <p:cNvPicPr>
+            <a:picLocks noChangeAspect="1"/>
+          </p:cNvPicPr>
+          <p:nvPr/>
+        </p:nvPicPr>
+        <p:blipFill>
+          <a:blip r:embed="rId3"/>
+          <a:stretch>
+            <a:fillRect/>
+          </a:stretch>
+        </p:blipFill>
+        <p:spPr>
+          <a:xfrm>
+            <a:off x="345565" y="1191604"/>
+            <a:ext cx="10351770" cy="5510157"/>
+          </a:xfrm>
+          <a:prstGeom prst="rect">
+            <a:avLst/>
+          </a:prstGeom>
+        </p:spPr>
+      </p:pic>
     </p:spTree>
     <p:extLst>
       <p:ext uri="{BB962C8B-B14F-4D97-AF65-F5344CB8AC3E}">
@@ -12715,7 +13080,7 @@
 </p:sld>
 </file>
 
-<file path=ppt/slides/slide17.xml><?xml version="1.0" encoding="utf-8"?>
+<file path=ppt/slides/slide18.xml><?xml version="1.0" encoding="utf-8"?>
 <p:sld xmlns:a="http://schemas.openxmlformats.org/drawingml/2006/main" xmlns:r="http://schemas.openxmlformats.org/officeDocument/2006/relationships" xmlns:p="http://schemas.openxmlformats.org/presentationml/2006/main">
   <p:cSld>
     <p:spTree>
@@ -13364,7 +13729,7 @@
 </p:sld>
 </file>
 
-<file path=ppt/slides/slide18.xml><?xml version="1.0" encoding="utf-8"?>
+<file path=ppt/slides/slide19.xml><?xml version="1.0" encoding="utf-8"?>
 <p:sld xmlns:a="http://schemas.openxmlformats.org/drawingml/2006/main" xmlns:r="http://schemas.openxmlformats.org/officeDocument/2006/relationships" xmlns:p="http://schemas.openxmlformats.org/presentationml/2006/main">
   <p:cSld>
     <p:bg>

--- a/docs/pitch/CYBR698_CapstoneProject_Presentation_WithSpeakerNotes.pptx
+++ b/docs/pitch/CYBR698_CapstoneProject_Presentation_WithSpeakerNotes.pptx
@@ -136,6 +136,7 @@
 <file path=ppt/revisionInfo.xml><?xml version="1.0" encoding="utf-8"?>
 <p1510:revInfo xmlns:a="http://schemas.openxmlformats.org/drawingml/2006/main" xmlns:r="http://schemas.openxmlformats.org/officeDocument/2006/relationships" xmlns:p1510="http://schemas.microsoft.com/office/powerpoint/2015/10/main">
   <p1510:revLst>
+    <p1510:client id="{BA3AE93F-9B64-4709-A4FC-8992D9763307}" v="1" dt="2025-12-08T05:34:30.525"/>
     <p1510:client id="{C7B33B64-54EE-4565-8BA0-135C0838E05F}" v="1" dt="2025-12-08T05:19:40.460"/>
   </p1510:revLst>
 </p1510:revInfo>
@@ -146,7 +147,7 @@
   <pc:docChgLst>
     <pc:chgData name="Bhandari, Ishita" userId="f19e3e0a-b09b-4c0e-bd9a-1660a3c48173" providerId="ADAL" clId="{298426B1-6A62-4EAD-923E-856376C23638}"/>
     <pc:docChg chg="custSel addSld modSld">
-      <pc:chgData name="Bhandari, Ishita" userId="f19e3e0a-b09b-4c0e-bd9a-1660a3c48173" providerId="ADAL" clId="{298426B1-6A62-4EAD-923E-856376C23638}" dt="2025-12-08T05:25:12.670" v="75" actId="14100"/>
+      <pc:chgData name="Bhandari, Ishita" userId="f19e3e0a-b09b-4c0e-bd9a-1660a3c48173" providerId="ADAL" clId="{298426B1-6A62-4EAD-923E-856376C23638}" dt="2025-12-08T05:35:02.478" v="137" actId="20577"/>
       <pc:docMkLst>
         <pc:docMk/>
       </pc:docMkLst>
@@ -173,8 +174,15 @@
           </ac:picMkLst>
         </pc:picChg>
       </pc:sldChg>
-      <pc:sldChg chg="addSp modSp mod">
-        <pc:chgData name="Bhandari, Ishita" userId="f19e3e0a-b09b-4c0e-bd9a-1660a3c48173" providerId="ADAL" clId="{298426B1-6A62-4EAD-923E-856376C23638}" dt="2025-12-08T05:25:12.670" v="75" actId="14100"/>
+      <pc:sldChg chg="modNotesTx">
+        <pc:chgData name="Bhandari, Ishita" userId="f19e3e0a-b09b-4c0e-bd9a-1660a3c48173" providerId="ADAL" clId="{298426B1-6A62-4EAD-923E-856376C23638}" dt="2025-12-08T05:34:29.644" v="76" actId="6549"/>
+        <pc:sldMkLst>
+          <pc:docMk/>
+          <pc:sldMk cId="3760243975" sldId="314"/>
+        </pc:sldMkLst>
+      </pc:sldChg>
+      <pc:sldChg chg="addSp modSp mod modNotesTx">
+        <pc:chgData name="Bhandari, Ishita" userId="f19e3e0a-b09b-4c0e-bd9a-1660a3c48173" providerId="ADAL" clId="{298426B1-6A62-4EAD-923E-856376C23638}" dt="2025-12-08T05:35:02.478" v="137" actId="20577"/>
         <pc:sldMkLst>
           <pc:docMk/>
           <pc:sldMk cId="1489247190" sldId="315"/>
@@ -1505,72 +1513,158 @@
           <a:lstStyle/>
           <a:p>
             <a:r>
-              <a:rPr lang="en-US" dirty="0"/>
+              <a:rPr lang="en-US" sz="1200" b="0" kern="1200" dirty="0">
+                <a:solidFill>
+                  <a:schemeClr val="tx1"/>
+                </a:solidFill>
+                <a:effectLst/>
+                <a:latin typeface="+mn-lt"/>
+                <a:ea typeface="+mn-ea"/>
+                <a:cs typeface="+mn-cs"/>
+              </a:rPr>
               <a:t>This research delivers three layers of impact that extend far beyond academia. </a:t>
             </a:r>
           </a:p>
           <a:p>
             <a:r>
-              <a:rPr lang="en-US" dirty="0"/>
+              <a:rPr lang="en-US" sz="1200" b="0" kern="1200" dirty="0">
+                <a:solidFill>
+                  <a:schemeClr val="tx1"/>
+                </a:solidFill>
+                <a:effectLst/>
+                <a:latin typeface="+mn-lt"/>
+                <a:ea typeface="+mn-ea"/>
+                <a:cs typeface="+mn-cs"/>
+              </a:rPr>
               <a:t>First, research impact: I've provided empirical evidence for PQC deployment across Finance, Healthcare, and IoT—three critical sectors that currently lack consensus on algorithm selection, performance baselines, and governance alignment. This fills a documented gap and delivers a CSF 2.0-aligned migration </a:t>
             </a:r>
           </a:p>
           <a:p>
             <a:r>
-              <a:rPr lang="en-US" dirty="0"/>
+              <a:rPr lang="en-US" sz="1200" b="0" kern="1200" dirty="0">
+                <a:solidFill>
+                  <a:schemeClr val="tx1"/>
+                </a:solidFill>
+                <a:effectLst/>
+                <a:latin typeface="+mn-lt"/>
+                <a:ea typeface="+mn-ea"/>
+                <a:cs typeface="+mn-cs"/>
+              </a:rPr>
               <a:t>roadmap. </a:t>
             </a:r>
           </a:p>
           <a:p>
             <a:r>
-              <a:rPr lang="en-US" dirty="0"/>
+              <a:rPr lang="en-US" sz="1200" b="0" kern="1200" dirty="0">
+                <a:solidFill>
+                  <a:schemeClr val="tx1"/>
+                </a:solidFill>
+                <a:effectLst/>
+                <a:latin typeface="+mn-lt"/>
+                <a:ea typeface="+mn-ea"/>
+                <a:cs typeface="+mn-cs"/>
+              </a:rPr>
               <a:t>Second, organizational value: my findings offer sector-specific algorithm recommendations (Kyber sub-30ms for Finance; SPHINCS for Healthcare archival), a risk-managed transition playbook (phased rollout, parallel crypto stacks, rollback procedures), a standards compliance framework (CSF 2.0 </a:t>
             </a:r>
             <a:r>
-              <a:rPr lang="en-US" dirty="0" err="1"/>
+              <a:rPr lang="en-US" sz="1200" b="0" kern="1200" dirty="0" err="1">
+                <a:solidFill>
+                  <a:schemeClr val="tx1"/>
+                </a:solidFill>
+                <a:effectLst/>
+                <a:latin typeface="+mn-lt"/>
+                <a:ea typeface="+mn-ea"/>
+                <a:cs typeface="+mn-cs"/>
+              </a:rPr>
               <a:t>Current→Target</a:t>
             </a:r>
             <a:r>
-              <a:rPr lang="en-US" dirty="0"/>
+              <a:rPr lang="en-US" sz="1200" b="0" kern="1200" dirty="0">
+                <a:solidFill>
+                  <a:schemeClr val="tx1"/>
+                </a:solidFill>
+                <a:effectLst/>
+                <a:latin typeface="+mn-lt"/>
+                <a:ea typeface="+mn-ea"/>
+                <a:cs typeface="+mn-cs"/>
+              </a:rPr>
               <a:t> Profile integration), and a metrics-driven governance model (</a:t>
             </a:r>
             <a:r>
-              <a:rPr lang="en-US" dirty="0" err="1"/>
+              <a:rPr lang="en-US" sz="1200" b="0" kern="1200" dirty="0" err="1">
+                <a:solidFill>
+                  <a:schemeClr val="tx1"/>
+                </a:solidFill>
+                <a:effectLst/>
+                <a:latin typeface="+mn-lt"/>
+                <a:ea typeface="+mn-ea"/>
+                <a:cs typeface="+mn-cs"/>
+              </a:rPr>
               <a:t>Risk→Requirement→Metric→Evidence</a:t>
             </a:r>
             <a:r>
-              <a:rPr lang="en-US" dirty="0"/>
-              <a:t> traceability). </a:t>
-            </a:r>
-            <a:br>
-              <a:rPr lang="en-US" dirty="0"/>
-            </a:br>
-            <a:r>
-              <a:rPr lang="en-US" dirty="0"/>
-              <a:t>Third, scalability: this reproducible methodology—accessible via the GitHub repository—enables adoption by CISA and NSA for quantum readiness initiatives, private organizations managing their PQC transitions, and government agencies aligning with NIST standards. </a:t>
-            </a:r>
-            <a:br>
-              <a:rPr lang="en-US" dirty="0"/>
-            </a:br>
-            <a:r>
-              <a:rPr lang="en-US" dirty="0"/>
-              <a:t>My next steps are ambitious but achievable: expand the qualitative cohort – more interviews. Review more research papers, publish findings in peer-reviewed venues (IEEE, ACM, NIST Journal), and contribute through blogs , articles related to PQC.</a:t>
-            </a:r>
-            <a:br>
-              <a:rPr lang="en-US" dirty="0"/>
-            </a:br>
-            <a:r>
-              <a:rPr lang="en-US" dirty="0"/>
-              <a:t>The full repository at github.com/ibhandari072021/</a:t>
-            </a:r>
-            <a:r>
-              <a:rPr lang="en-US" dirty="0" err="1"/>
+              <a:rPr lang="en-US" sz="1200" b="0" kern="1200" dirty="0">
+                <a:solidFill>
+                  <a:schemeClr val="tx1"/>
+                </a:solidFill>
+                <a:effectLst/>
+                <a:latin typeface="+mn-lt"/>
+                <a:ea typeface="+mn-ea"/>
+                <a:cs typeface="+mn-cs"/>
+              </a:rPr>
+              <a:t> traceability). Third, scalability: this reproducible methodology—accessible via the GitHub repository—enables adoption by CISA and NSA for quantum readiness initiatives, private organizations managing their PQC transitions, and government agencies aligning with NIST standards. My next steps are ambitious but achievable: expand the qualitative cohort – more interviews. Review more research papers, publish findings in peer-reviewed venues (IEEE, ACM, NIST Journal), and contribute through blogs , articles related to </a:t>
+            </a:r>
+            <a:r>
+              <a:rPr lang="en-US" sz="1200" b="0" kern="1200" dirty="0" err="1">
+                <a:solidFill>
+                  <a:schemeClr val="tx1"/>
+                </a:solidFill>
+                <a:effectLst/>
+                <a:latin typeface="+mn-lt"/>
+                <a:ea typeface="+mn-ea"/>
+                <a:cs typeface="+mn-cs"/>
+              </a:rPr>
+              <a:t>PQC.The</a:t>
+            </a:r>
+            <a:r>
+              <a:rPr lang="en-US" sz="1200" b="0" kern="1200" dirty="0">
+                <a:solidFill>
+                  <a:schemeClr val="tx1"/>
+                </a:solidFill>
+                <a:effectLst/>
+                <a:latin typeface="+mn-lt"/>
+                <a:ea typeface="+mn-ea"/>
+                <a:cs typeface="+mn-cs"/>
+              </a:rPr>
+              <a:t> full repository at github.com/ibhandari072021/</a:t>
+            </a:r>
+            <a:r>
+              <a:rPr lang="en-US" sz="1200" b="0" kern="1200" dirty="0" err="1">
+                <a:solidFill>
+                  <a:schemeClr val="tx1"/>
+                </a:solidFill>
+                <a:effectLst/>
+                <a:latin typeface="+mn-lt"/>
+                <a:ea typeface="+mn-ea"/>
+                <a:cs typeface="+mn-cs"/>
+              </a:rPr>
               <a:t>PostQuantumCryptography</a:t>
             </a:r>
             <a:r>
-              <a:rPr lang="en-US" dirty="0"/>
+              <a:rPr lang="en-US" sz="1200" b="0" kern="1200" dirty="0">
+                <a:solidFill>
+                  <a:schemeClr val="tx1"/>
+                </a:solidFill>
+                <a:effectLst/>
+                <a:latin typeface="+mn-lt"/>
+                <a:ea typeface="+mn-ea"/>
+                <a:cs typeface="+mn-cs"/>
+              </a:rPr>
               <a:t> contains all artifacts and the reproducible pipeline.</a:t>
             </a:r>
+          </a:p>
+          <a:p>
+            <a:endParaRPr lang="en-US" dirty="0"/>
           </a:p>
         </p:txBody>
       </p:sp>
@@ -1679,9 +1773,26 @@
           <a:lstStyle/>
           <a:p>
             <a:r>
+              <a:rPr lang="en-US" dirty="0" err="1"/>
+              <a:t>Github</a:t>
+            </a:r>
+            <a:r>
               <a:rPr lang="en-US" dirty="0"/>
-              <a:t>Two CSF Outcomes (PR.DS, PR.PS) with Current → Target states. Copy-exact Outcome text + page required. Current: manual, ad-hoc PQC ops. Target: automated, compliant deployment with continuous monitoring. Organizations move from Tier 2 (Risk Informed) to Tier 3 (Repeatable) per SP 1301 governance framework.</a:t>
-            </a:r>
+              <a:t> repo. Docs/pitch </a:t>
+            </a:r>
+            <a:r>
+              <a:rPr lang="en-US"/>
+              <a:t>and Readme</a:t>
+            </a:r>
+            <a:r>
+              <a:rPr lang="en-US" dirty="0"/>
+              <a:t>.</a:t>
+            </a:r>
+            <a:r>
+              <a:rPr lang="en-US"/>
+              <a:t>md updated</a:t>
+            </a:r>
+            <a:endParaRPr lang="en-US" dirty="0"/>
           </a:p>
         </p:txBody>
       </p:sp>
